--- a/figures/figure_overview.pptx
+++ b/figures/figure_overview.pptx
@@ -123,19 +123,27 @@
 <pc:chgInfo xmlns:a="http://schemas.openxmlformats.org/drawingml/2006/main" xmlns:r="http://schemas.openxmlformats.org/officeDocument/2006/relationships" xmlns:ac="http://schemas.microsoft.com/office/drawing/2013/main/command" xmlns:pc="http://schemas.microsoft.com/office/powerpoint/2013/main/command">
   <pc:docChgLst>
     <pc:chgData name="Meg McConnell" userId="c879f9b530a4a8ef" providerId="LiveId" clId="{EEE61486-0C36-4C9F-8DDF-56891260361C}"/>
-    <pc:docChg chg="addSld modSld sldOrd">
-      <pc:chgData name="Meg McConnell" userId="c879f9b530a4a8ef" providerId="LiveId" clId="{EEE61486-0C36-4C9F-8DDF-56891260361C}" dt="2026-04-21T19:10:18.103" v="14" actId="14100"/>
+    <pc:docChg chg="undo custSel addSld modSld sldOrd">
+      <pc:chgData name="Meg McConnell" userId="c879f9b530a4a8ef" providerId="LiveId" clId="{EEE61486-0C36-4C9F-8DDF-56891260361C}" dt="2026-04-29T15:19:57.904" v="28" actId="1076"/>
       <pc:docMkLst>
         <pc:docMk/>
       </pc:docMkLst>
       <pc:sldChg chg="addSp modSp new mod">
-        <pc:chgData name="Meg McConnell" userId="c879f9b530a4a8ef" providerId="LiveId" clId="{EEE61486-0C36-4C9F-8DDF-56891260361C}" dt="2026-04-21T19:09:31.705" v="8" actId="1076"/>
+        <pc:chgData name="Meg McConnell" userId="c879f9b530a4a8ef" providerId="LiveId" clId="{EEE61486-0C36-4C9F-8DDF-56891260361C}" dt="2026-04-29T15:19:57.904" v="28" actId="1076"/>
         <pc:sldMkLst>
           <pc:docMk/>
           <pc:sldMk cId="2763598328" sldId="263"/>
         </pc:sldMkLst>
+        <pc:spChg chg="mod">
+          <ac:chgData name="Meg McConnell" userId="c879f9b530a4a8ef" providerId="LiveId" clId="{EEE61486-0C36-4C9F-8DDF-56891260361C}" dt="2026-04-29T15:19:55.867" v="25" actId="20577"/>
+          <ac:spMkLst>
+            <pc:docMk/>
+            <pc:sldMk cId="2763598328" sldId="263"/>
+            <ac:spMk id="2" creationId="{52A179AE-958C-F5D2-C2BF-FEAB35FCA205}"/>
+          </ac:spMkLst>
+        </pc:spChg>
         <pc:picChg chg="add mod">
-          <ac:chgData name="Meg McConnell" userId="c879f9b530a4a8ef" providerId="LiveId" clId="{EEE61486-0C36-4C9F-8DDF-56891260361C}" dt="2026-04-21T19:09:31.705" v="8" actId="1076"/>
+          <ac:chgData name="Meg McConnell" userId="c879f9b530a4a8ef" providerId="LiveId" clId="{EEE61486-0C36-4C9F-8DDF-56891260361C}" dt="2026-04-29T15:19:57.904" v="28" actId="1076"/>
           <ac:picMkLst>
             <pc:docMk/>
             <pc:sldMk cId="2763598328" sldId="263"/>
@@ -4125,7 +4133,7 @@
           <a:bodyPr/>
           <a:lstStyle/>
           <a:p>
-            <a:endParaRPr lang="en-US"/>
+            <a:endParaRPr lang="en-US" dirty="0"/>
           </a:p>
         </p:txBody>
       </p:sp>
